--- a/word-drafts/figures/Observability-Fig7-DI-DataSet.pptx
+++ b/word-drafts/figures/Observability-Fig7-DI-DataSet.pptx
@@ -3729,7 +3729,7 @@
         <p:spPr>
           <a:xfrm>
             <a:off x="3309937" y="1228725"/>
-            <a:ext cx="504825" cy="123825"/>
+            <a:ext cx="638175" cy="123825"/>
           </a:xfrm>
           <a:prstGeom prst="rect">
             <a:avLst/>
@@ -3800,7 +3800,7 @@
         <p:spPr>
           <a:xfrm>
             <a:off x="4595812" y="1228725"/>
-            <a:ext cx="619125" cy="123825"/>
+            <a:ext cx="762000" cy="123825"/>
           </a:xfrm>
           <a:prstGeom prst="rect">
             <a:avLst/>
@@ -3872,7 +3872,7 @@
         <p:spPr>
           <a:xfrm>
             <a:off x="3952875" y="2314575"/>
-            <a:ext cx="485775" cy="123825"/>
+            <a:ext cx="609600" cy="123825"/>
           </a:xfrm>
           <a:prstGeom prst="rect">
             <a:avLst/>
@@ -3943,7 +3943,7 @@
         <p:spPr>
           <a:xfrm>
             <a:off x="5238750" y="2314575"/>
-            <a:ext cx="619125" cy="123825"/>
+            <a:ext cx="762000" cy="123825"/>
           </a:xfrm>
           <a:prstGeom prst="rect">
             <a:avLst/>
@@ -4014,7 +4014,7 @@
         <p:spPr>
           <a:xfrm>
             <a:off x="3309937" y="3400425"/>
-            <a:ext cx="619125" cy="123825"/>
+            <a:ext cx="762000" cy="123825"/>
           </a:xfrm>
           <a:prstGeom prst="rect">
             <a:avLst/>
@@ -4085,7 +4085,7 @@
         <p:spPr>
           <a:xfrm>
             <a:off x="1381125" y="4486275"/>
-            <a:ext cx="542925" cy="123825"/>
+            <a:ext cx="666750" cy="123825"/>
           </a:xfrm>
           <a:prstGeom prst="rect">
             <a:avLst/>
@@ -4156,7 +4156,7 @@
         <p:spPr>
           <a:xfrm>
             <a:off x="4595812" y="3400425"/>
-            <a:ext cx="619125" cy="123825"/>
+            <a:ext cx="762000" cy="123825"/>
           </a:xfrm>
           <a:prstGeom prst="rect">
             <a:avLst/>
@@ -4227,7 +4227,7 @@
         <p:spPr>
           <a:xfrm>
             <a:off x="3952875" y="4486275"/>
-            <a:ext cx="542925" cy="123825"/>
+            <a:ext cx="666750" cy="123825"/>
           </a:xfrm>
           <a:prstGeom prst="rect">
             <a:avLst/>
@@ -4298,7 +4298,7 @@
         <p:spPr>
           <a:xfrm>
             <a:off x="5881687" y="3400425"/>
-            <a:ext cx="619125" cy="123825"/>
+            <a:ext cx="762000" cy="123825"/>
           </a:xfrm>
           <a:prstGeom prst="rect">
             <a:avLst/>
@@ -4369,7 +4369,7 @@
         <p:spPr>
           <a:xfrm>
             <a:off x="6524625" y="4486275"/>
-            <a:ext cx="542925" cy="123825"/>
+            <a:ext cx="666750" cy="123825"/>
           </a:xfrm>
           <a:prstGeom prst="rect">
             <a:avLst/>
